--- a/프로젝트발표/자바은행.pptx
+++ b/프로젝트발표/자바은행.pptx
@@ -13044,8 +13044,8 @@
         </p:nvSpPr>
         <p:spPr>
           <a:xfrm>
-            <a:off x="5602147" y="217721"/>
-            <a:ext cx="6587923" cy="6640279"/>
+            <a:off x="5604077" y="462803"/>
+            <a:ext cx="6587923" cy="5932393"/>
           </a:xfrm>
           <a:prstGeom prst="rect">
             <a:avLst/>
@@ -14025,277 +14025,11 @@
               </a:rPr>
               <a:t>    }</a:t>
             </a:r>
-            <a:br>
-              <a:rPr lang="en-US" altLang="ko-KR" sz="1150" dirty="0">
-                <a:solidFill>
-                  <a:srgbClr val="BBBBBB"/>
-                </a:solidFill>
-                <a:effectLst/>
-                <a:latin typeface="D2Coding" panose="020B0609020101020101" pitchFamily="49" charset="-127"/>
-                <a:ea typeface="D2Coding" panose="020B0609020101020101" pitchFamily="49" charset="-127"/>
-              </a:rPr>
-            </a:br>
-            <a:r>
-              <a:rPr lang="en-US" altLang="ko-KR" sz="1150" dirty="0">
-                <a:solidFill>
-                  <a:srgbClr val="BBBBBB"/>
-                </a:solidFill>
-                <a:effectLst/>
-                <a:latin typeface="D2Coding" panose="020B0609020101020101" pitchFamily="49" charset="-127"/>
-                <a:ea typeface="D2Coding" panose="020B0609020101020101" pitchFamily="49" charset="-127"/>
-              </a:rPr>
-              <a:t>    </a:t>
-            </a:r>
-            <a:r>
-              <a:rPr lang="en-US" altLang="ko-KR" sz="1150" dirty="0">
-                <a:solidFill>
-                  <a:srgbClr val="D55FDE"/>
-                </a:solidFill>
-                <a:effectLst/>
-                <a:latin typeface="D2Coding" panose="020B0609020101020101" pitchFamily="49" charset="-127"/>
-                <a:ea typeface="D2Coding" panose="020B0609020101020101" pitchFamily="49" charset="-127"/>
-              </a:rPr>
-              <a:t>if </a:t>
-            </a:r>
-            <a:r>
-              <a:rPr lang="en-US" altLang="ko-KR" sz="1150" dirty="0">
-                <a:solidFill>
-                  <a:srgbClr val="BBBBBB"/>
-                </a:solidFill>
-                <a:effectLst/>
-                <a:latin typeface="D2Coding" panose="020B0609020101020101" pitchFamily="49" charset="-127"/>
-                <a:ea typeface="D2Coding" panose="020B0609020101020101" pitchFamily="49" charset="-127"/>
-              </a:rPr>
-              <a:t>(</a:t>
-            </a:r>
-            <a:r>
-              <a:rPr lang="en-US" altLang="ko-KR" sz="1150" dirty="0" err="1">
-                <a:solidFill>
-                  <a:srgbClr val="BBBBBB"/>
-                </a:solidFill>
-                <a:effectLst/>
-                <a:latin typeface="D2Coding" panose="020B0609020101020101" pitchFamily="49" charset="-127"/>
-                <a:ea typeface="D2Coding" panose="020B0609020101020101" pitchFamily="49" charset="-127"/>
-              </a:rPr>
-              <a:t>account.</a:t>
-            </a:r>
-            <a:r>
-              <a:rPr lang="en-US" altLang="ko-KR" sz="1150" dirty="0" err="1">
-                <a:solidFill>
-                  <a:srgbClr val="61AFEF"/>
-                </a:solidFill>
-                <a:effectLst/>
-                <a:latin typeface="D2Coding" panose="020B0609020101020101" pitchFamily="49" charset="-127"/>
-                <a:ea typeface="D2Coding" panose="020B0609020101020101" pitchFamily="49" charset="-127"/>
-              </a:rPr>
-              <a:t>isLogined</a:t>
-            </a:r>
-            <a:r>
-              <a:rPr lang="en-US" altLang="ko-KR" sz="1150" dirty="0">
-                <a:solidFill>
-                  <a:srgbClr val="BBBBBB"/>
-                </a:solidFill>
-                <a:effectLst/>
-                <a:latin typeface="D2Coding" panose="020B0609020101020101" pitchFamily="49" charset="-127"/>
-                <a:ea typeface="D2Coding" panose="020B0609020101020101" pitchFamily="49" charset="-127"/>
-              </a:rPr>
-              <a:t>()) {</a:t>
-            </a:r>
-            <a:br>
-              <a:rPr lang="en-US" altLang="ko-KR" sz="1150" dirty="0">
-                <a:solidFill>
-                  <a:srgbClr val="BBBBBB"/>
-                </a:solidFill>
-                <a:effectLst/>
-                <a:latin typeface="D2Coding" panose="020B0609020101020101" pitchFamily="49" charset="-127"/>
-                <a:ea typeface="D2Coding" panose="020B0609020101020101" pitchFamily="49" charset="-127"/>
-              </a:rPr>
-            </a:br>
-            <a:r>
-              <a:rPr lang="en-US" altLang="ko-KR" sz="1150" dirty="0">
-                <a:solidFill>
-                  <a:srgbClr val="BBBBBB"/>
-                </a:solidFill>
-                <a:effectLst/>
-                <a:latin typeface="D2Coding" panose="020B0609020101020101" pitchFamily="49" charset="-127"/>
-                <a:ea typeface="D2Coding" panose="020B0609020101020101" pitchFamily="49" charset="-127"/>
-              </a:rPr>
-              <a:t>        </a:t>
-            </a:r>
-            <a:r>
-              <a:rPr lang="en-US" altLang="ko-KR" sz="1150" dirty="0" err="1">
-                <a:solidFill>
-                  <a:srgbClr val="E5C07B"/>
-                </a:solidFill>
-                <a:effectLst/>
-                <a:latin typeface="D2Coding" panose="020B0609020101020101" pitchFamily="49" charset="-127"/>
-                <a:ea typeface="D2Coding" panose="020B0609020101020101" pitchFamily="49" charset="-127"/>
-              </a:rPr>
-              <a:t>System</a:t>
-            </a:r>
-            <a:r>
-              <a:rPr lang="en-US" altLang="ko-KR" sz="1150" dirty="0" err="1">
-                <a:solidFill>
-                  <a:srgbClr val="BBBBBB"/>
-                </a:solidFill>
-                <a:effectLst/>
-                <a:latin typeface="D2Coding" panose="020B0609020101020101" pitchFamily="49" charset="-127"/>
-                <a:ea typeface="D2Coding" panose="020B0609020101020101" pitchFamily="49" charset="-127"/>
-              </a:rPr>
-              <a:t>.</a:t>
-            </a:r>
-            <a:r>
-              <a:rPr lang="en-US" altLang="ko-KR" sz="1150" dirty="0" err="1">
-                <a:solidFill>
-                  <a:srgbClr val="D19A66"/>
-                </a:solidFill>
-                <a:effectLst/>
-                <a:latin typeface="D2Coding" panose="020B0609020101020101" pitchFamily="49" charset="-127"/>
-                <a:ea typeface="D2Coding" panose="020B0609020101020101" pitchFamily="49" charset="-127"/>
-              </a:rPr>
-              <a:t>out</a:t>
-            </a:r>
-            <a:r>
-              <a:rPr lang="en-US" altLang="ko-KR" sz="1150" dirty="0" err="1">
-                <a:solidFill>
-                  <a:srgbClr val="BBBBBB"/>
-                </a:solidFill>
-                <a:effectLst/>
-                <a:latin typeface="D2Coding" panose="020B0609020101020101" pitchFamily="49" charset="-127"/>
-                <a:ea typeface="D2Coding" panose="020B0609020101020101" pitchFamily="49" charset="-127"/>
-              </a:rPr>
-              <a:t>.</a:t>
-            </a:r>
-            <a:r>
-              <a:rPr lang="en-US" altLang="ko-KR" sz="1150" dirty="0" err="1">
-                <a:solidFill>
-                  <a:srgbClr val="61AFEF"/>
-                </a:solidFill>
-                <a:effectLst/>
-                <a:latin typeface="D2Coding" panose="020B0609020101020101" pitchFamily="49" charset="-127"/>
-                <a:ea typeface="D2Coding" panose="020B0609020101020101" pitchFamily="49" charset="-127"/>
-              </a:rPr>
-              <a:t>println</a:t>
-            </a:r>
-            <a:r>
-              <a:rPr lang="en-US" altLang="ko-KR" sz="1150" dirty="0">
-                <a:solidFill>
-                  <a:srgbClr val="BBBBBB"/>
-                </a:solidFill>
-                <a:effectLst/>
-                <a:latin typeface="D2Coding" panose="020B0609020101020101" pitchFamily="49" charset="-127"/>
-                <a:ea typeface="D2Coding" panose="020B0609020101020101" pitchFamily="49" charset="-127"/>
-              </a:rPr>
-              <a:t>(</a:t>
-            </a:r>
-            <a:r>
-              <a:rPr lang="en-US" altLang="ko-KR" sz="1150" dirty="0">
-                <a:solidFill>
-                  <a:srgbClr val="89CA78"/>
-                </a:solidFill>
-                <a:effectLst/>
-                <a:latin typeface="D2Coding" panose="020B0609020101020101" pitchFamily="49" charset="-127"/>
-                <a:ea typeface="D2Coding" panose="020B0609020101020101" pitchFamily="49" charset="-127"/>
-              </a:rPr>
-              <a:t>"</a:t>
-            </a:r>
-            <a:r>
-              <a:rPr lang="ko-KR" altLang="en-US" sz="1150" dirty="0">
-                <a:solidFill>
-                  <a:srgbClr val="89CA78"/>
-                </a:solidFill>
-                <a:effectLst/>
-                <a:latin typeface="D2Coding" panose="020B0609020101020101" pitchFamily="49" charset="-127"/>
-                <a:ea typeface="D2Coding" panose="020B0609020101020101" pitchFamily="49" charset="-127"/>
-              </a:rPr>
-              <a:t>로그아웃을 해주세요</a:t>
-            </a:r>
-            <a:r>
-              <a:rPr lang="en-US" altLang="ko-KR" sz="1150" dirty="0">
-                <a:solidFill>
-                  <a:srgbClr val="89CA78"/>
-                </a:solidFill>
-                <a:effectLst/>
-                <a:latin typeface="D2Coding" panose="020B0609020101020101" pitchFamily="49" charset="-127"/>
-                <a:ea typeface="D2Coding" panose="020B0609020101020101" pitchFamily="49" charset="-127"/>
-              </a:rPr>
-              <a:t>"</a:t>
-            </a:r>
-            <a:r>
-              <a:rPr lang="en-US" altLang="ko-KR" sz="1150" dirty="0">
-                <a:solidFill>
-                  <a:srgbClr val="BBBBBB"/>
-                </a:solidFill>
-                <a:effectLst/>
-                <a:latin typeface="D2Coding" panose="020B0609020101020101" pitchFamily="49" charset="-127"/>
-                <a:ea typeface="D2Coding" panose="020B0609020101020101" pitchFamily="49" charset="-127"/>
-              </a:rPr>
-              <a:t>);</a:t>
-            </a:r>
-            <a:br>
-              <a:rPr lang="en-US" altLang="ko-KR" sz="1150" dirty="0">
-                <a:solidFill>
-                  <a:srgbClr val="BBBBBB"/>
-                </a:solidFill>
-                <a:effectLst/>
-                <a:latin typeface="D2Coding" panose="020B0609020101020101" pitchFamily="49" charset="-127"/>
-                <a:ea typeface="D2Coding" panose="020B0609020101020101" pitchFamily="49" charset="-127"/>
-              </a:rPr>
-            </a:br>
-            <a:r>
-              <a:rPr lang="en-US" altLang="ko-KR" sz="1150" dirty="0">
-                <a:solidFill>
-                  <a:srgbClr val="BBBBBB"/>
-                </a:solidFill>
-                <a:effectLst/>
-                <a:latin typeface="D2Coding" panose="020B0609020101020101" pitchFamily="49" charset="-127"/>
-                <a:ea typeface="D2Coding" panose="020B0609020101020101" pitchFamily="49" charset="-127"/>
-              </a:rPr>
-              <a:t>        </a:t>
-            </a:r>
-            <a:r>
-              <a:rPr lang="en-US" altLang="ko-KR" sz="1150" dirty="0">
-                <a:solidFill>
-                  <a:srgbClr val="D55FDE"/>
-                </a:solidFill>
-                <a:effectLst/>
-                <a:latin typeface="D2Coding" panose="020B0609020101020101" pitchFamily="49" charset="-127"/>
-                <a:ea typeface="D2Coding" panose="020B0609020101020101" pitchFamily="49" charset="-127"/>
-              </a:rPr>
-              <a:t>return false</a:t>
-            </a:r>
-            <a:r>
-              <a:rPr lang="en-US" altLang="ko-KR" sz="1150" dirty="0">
-                <a:solidFill>
-                  <a:srgbClr val="BBBBBB"/>
-                </a:solidFill>
-                <a:effectLst/>
-                <a:latin typeface="D2Coding" panose="020B0609020101020101" pitchFamily="49" charset="-127"/>
-                <a:ea typeface="D2Coding" panose="020B0609020101020101" pitchFamily="49" charset="-127"/>
-              </a:rPr>
-              <a:t>;</a:t>
-            </a:r>
-            <a:br>
-              <a:rPr lang="en-US" altLang="ko-KR" sz="1150" dirty="0">
-                <a:solidFill>
-                  <a:srgbClr val="BBBBBB"/>
-                </a:solidFill>
-                <a:effectLst/>
-                <a:latin typeface="D2Coding" panose="020B0609020101020101" pitchFamily="49" charset="-127"/>
-                <a:ea typeface="D2Coding" panose="020B0609020101020101" pitchFamily="49" charset="-127"/>
-              </a:rPr>
-            </a:br>
-            <a:r>
-              <a:rPr lang="en-US" altLang="ko-KR" sz="1150" dirty="0">
-                <a:solidFill>
-                  <a:srgbClr val="BBBBBB"/>
-                </a:solidFill>
-                <a:effectLst/>
-                <a:latin typeface="D2Coding" panose="020B0609020101020101" pitchFamily="49" charset="-127"/>
-                <a:ea typeface="D2Coding" panose="020B0609020101020101" pitchFamily="49" charset="-127"/>
-              </a:rPr>
-              <a:t>    }</a:t>
-            </a:r>
+          </a:p>
+          <a:p>
+            <a:pPr>
+              <a:buNone/>
+            </a:pPr>
             <a:br>
               <a:rPr lang="en-US" altLang="ko-KR" sz="1150" dirty="0">
                 <a:solidFill>
